--- a/reports/slides/NLP_ITviec_Sentiment_Slides.pptx
+++ b/reports/slides/NLP_ITviec_Sentiment_Slides.pptx
@@ -24759,7 +24759,7 @@
                 </a:solidFill>
                 <a:latin typeface="Segoe UI"/>
               </a:rPr>
-              <a:t>0.5579 → 0.5658</a:t>
+              <a:t>0.5579 → 0.5664</a:t>
             </a:r>
           </a:p>
         </p:txBody>
@@ -24899,7 +24899,7 @@
                 </a:solidFill>
                 <a:latin typeface="Segoe UI"/>
               </a:rPr>
-              <a:t>45.6% → 48.2%</a:t>
+              <a:t>45.6% → 48.0%</a:t>
             </a:r>
           </a:p>
         </p:txBody>
